--- a/teaching-pack/11-M07-training-mismatch/M07-student.pptx
+++ b/teaching-pack/11-M07-training-mismatch/M07-student.pptx
@@ -978,7 +978,7 @@
           <a:p/>
           <a:p>
             <a:r>
-              <a:t>CLOSE — Collect Note version 2 only. Light hook: “The conditions around a bridge do not stay fixed through the year.” Do not name temperature as damage, thermal expansion, or the M08 mechanism.</a:t>
+              <a:t>CLOSE — Collect Note version 2 only. Light hook: “The conditions around a bridge do not stay fixed through the year.” Do not explain the M08 mechanism.</a:t>
             </a:r>
           </a:p>
         </p:txBody>

--- a/teaching-pack/11-M07-training-mismatch/M07-student.pptx
+++ b/teaching-pack/11-M07-training-mismatch/M07-student.pptx
@@ -1054,7 +1054,7 @@
           <a:p/>
           <a:p>
             <a:r>
-              <a:t>INBOX — DIANE: “It looked at 400 photos in a minute. Give me a reason not to use it.” WES: “I'm drafting the memo to accept the machinery rating based on the vendor summary.” STUDENT: “Wait, I need to check the training data source first.”</a:t>
+              <a:t>INBOX — Diane Halvorsen, PE: “It looked at 400 photos in a minute. Give me a reason not to use it.” Wes Tanaka, EIT: “I'm drafting the memo to accept the machinery rating based on the vendor summary.” STUDENT: “Wait, I need to check the training data source first.”</a:t>
             </a:r>
           </a:p>
         </p:txBody>
